--- a/docs/songs/shout to the lord.pptx
+++ b/docs/songs/shout to the lord.pptx
@@ -7,8 +7,9 @@
   <p:sldIdLst>
     <p:sldId id="565" r:id="rId2"/>
     <p:sldId id="566" r:id="rId3"/>
-    <p:sldId id="567" r:id="rId4"/>
-    <p:sldId id="485" r:id="rId5"/>
+    <p:sldId id="1630" r:id="rId4"/>
+    <p:sldId id="567" r:id="rId5"/>
+    <p:sldId id="485" r:id="rId6"/>
   </p:sldIdLst>
   <p:sldSz cx="9144000" cy="6858000" type="screen4x3"/>
   <p:notesSz cx="6858000" cy="9144000"/>
@@ -308,7 +309,7 @@
             <a:fld id="{26EA1CF3-4A15-4CBF-9A5A-6A56C368BE71}" type="datetimeFigureOut">
               <a:rPr lang="en-GB" smtClean="0"/>
               <a:pPr/>
-              <a:t>30/03/2025</a:t>
+              <a:t>14/09/2026</a:t>
             </a:fld>
             <a:endParaRPr lang="en-GB"/>
           </a:p>
@@ -475,7 +476,7 @@
             <a:fld id="{26EA1CF3-4A15-4CBF-9A5A-6A56C368BE71}" type="datetimeFigureOut">
               <a:rPr lang="en-GB" smtClean="0"/>
               <a:pPr/>
-              <a:t>30/03/2025</a:t>
+              <a:t>14/09/2026</a:t>
             </a:fld>
             <a:endParaRPr lang="en-GB"/>
           </a:p>
@@ -652,7 +653,7 @@
             <a:fld id="{26EA1CF3-4A15-4CBF-9A5A-6A56C368BE71}" type="datetimeFigureOut">
               <a:rPr lang="en-GB" smtClean="0"/>
               <a:pPr/>
-              <a:t>30/03/2025</a:t>
+              <a:t>14/09/2026</a:t>
             </a:fld>
             <a:endParaRPr lang="en-GB"/>
           </a:p>
@@ -819,7 +820,7 @@
             <a:fld id="{26EA1CF3-4A15-4CBF-9A5A-6A56C368BE71}" type="datetimeFigureOut">
               <a:rPr lang="en-GB" smtClean="0"/>
               <a:pPr/>
-              <a:t>30/03/2025</a:t>
+              <a:t>14/09/2026</a:t>
             </a:fld>
             <a:endParaRPr lang="en-GB"/>
           </a:p>
@@ -1062,7 +1063,7 @@
             <a:fld id="{26EA1CF3-4A15-4CBF-9A5A-6A56C368BE71}" type="datetimeFigureOut">
               <a:rPr lang="en-GB" smtClean="0"/>
               <a:pPr/>
-              <a:t>30/03/2025</a:t>
+              <a:t>14/09/2026</a:t>
             </a:fld>
             <a:endParaRPr lang="en-GB"/>
           </a:p>
@@ -1347,7 +1348,7 @@
             <a:fld id="{26EA1CF3-4A15-4CBF-9A5A-6A56C368BE71}" type="datetimeFigureOut">
               <a:rPr lang="en-GB" smtClean="0"/>
               <a:pPr/>
-              <a:t>30/03/2025</a:t>
+              <a:t>14/09/2026</a:t>
             </a:fld>
             <a:endParaRPr lang="en-GB"/>
           </a:p>
@@ -1766,7 +1767,7 @@
             <a:fld id="{26EA1CF3-4A15-4CBF-9A5A-6A56C368BE71}" type="datetimeFigureOut">
               <a:rPr lang="en-GB" smtClean="0"/>
               <a:pPr/>
-              <a:t>30/03/2025</a:t>
+              <a:t>14/09/2026</a:t>
             </a:fld>
             <a:endParaRPr lang="en-GB"/>
           </a:p>
@@ -1881,7 +1882,7 @@
             <a:fld id="{26EA1CF3-4A15-4CBF-9A5A-6A56C368BE71}" type="datetimeFigureOut">
               <a:rPr lang="en-GB" smtClean="0"/>
               <a:pPr/>
-              <a:t>30/03/2025</a:t>
+              <a:t>14/09/2026</a:t>
             </a:fld>
             <a:endParaRPr lang="en-GB"/>
           </a:p>
@@ -1973,7 +1974,7 @@
             <a:fld id="{26EA1CF3-4A15-4CBF-9A5A-6A56C368BE71}" type="datetimeFigureOut">
               <a:rPr lang="en-GB" smtClean="0"/>
               <a:pPr/>
-              <a:t>30/03/2025</a:t>
+              <a:t>14/09/2026</a:t>
             </a:fld>
             <a:endParaRPr lang="en-GB"/>
           </a:p>
@@ -2247,7 +2248,7 @@
             <a:fld id="{26EA1CF3-4A15-4CBF-9A5A-6A56C368BE71}" type="datetimeFigureOut">
               <a:rPr lang="en-GB" smtClean="0"/>
               <a:pPr/>
-              <a:t>30/03/2025</a:t>
+              <a:t>14/09/2026</a:t>
             </a:fld>
             <a:endParaRPr lang="en-GB"/>
           </a:p>
@@ -2497,7 +2498,7 @@
             <a:fld id="{26EA1CF3-4A15-4CBF-9A5A-6A56C368BE71}" type="datetimeFigureOut">
               <a:rPr lang="en-GB" smtClean="0"/>
               <a:pPr/>
-              <a:t>30/03/2025</a:t>
+              <a:t>14/09/2026</a:t>
             </a:fld>
             <a:endParaRPr lang="en-GB"/>
           </a:p>
@@ -2710,7 +2711,7 @@
             <a:fld id="{26EA1CF3-4A15-4CBF-9A5A-6A56C368BE71}" type="datetimeFigureOut">
               <a:rPr lang="en-GB" smtClean="0"/>
               <a:pPr/>
-              <a:t>30/03/2025</a:t>
+              <a:t>14/09/2026</a:t>
             </a:fld>
             <a:endParaRPr lang="en-GB"/>
           </a:p>
@@ -3354,46 +3355,6 @@
               <a:t>The wonders of Your mighty love</a:t>
             </a:r>
           </a:p>
-          <a:p>
-            <a:r>
-              <a:rPr lang="en-GB" sz="3600" dirty="0">
-                <a:solidFill>
-                  <a:schemeClr val="bg1"/>
-                </a:solidFill>
-              </a:rPr>
-              <a:t>My comfort my shelter</a:t>
-            </a:r>
-          </a:p>
-          <a:p>
-            <a:r>
-              <a:rPr lang="en-GB" sz="3600" dirty="0">
-                <a:solidFill>
-                  <a:schemeClr val="bg1"/>
-                </a:solidFill>
-              </a:rPr>
-              <a:t>Tower of refuge and strength</a:t>
-            </a:r>
-          </a:p>
-          <a:p>
-            <a:r>
-              <a:rPr lang="en-GB" sz="3600" dirty="0">
-                <a:solidFill>
-                  <a:schemeClr val="bg1"/>
-                </a:solidFill>
-              </a:rPr>
-              <a:t>Let every breath all that I am</a:t>
-            </a:r>
-          </a:p>
-          <a:p>
-            <a:r>
-              <a:rPr lang="en-GB" sz="3600" dirty="0">
-                <a:solidFill>
-                  <a:schemeClr val="bg1"/>
-                </a:solidFill>
-              </a:rPr>
-              <a:t>Never cease to worship You</a:t>
-            </a:r>
-          </a:p>
         </p:txBody>
       </p:sp>
       <p:sp>
@@ -3424,7 +3385,7 @@
                   <a:schemeClr val="bg1"/>
                 </a:solidFill>
               </a:rPr>
-              <a:t>1/3</a:t>
+              <a:t>1/4</a:t>
             </a:r>
           </a:p>
         </p:txBody>
@@ -3447,7 +3408,13 @@
   <p:cSld>
     <p:spTree>
       <p:nvGrpSpPr>
-        <p:cNvPr id="1" name=""/>
+        <p:cNvPr id="1" name="">
+          <a:extLst>
+            <a:ext uri="{FF2B5EF4-FFF2-40B4-BE49-F238E27FC236}">
+              <a16:creationId xmlns:a16="http://schemas.microsoft.com/office/drawing/2014/main" id="{9177B660-AFD5-2721-4D21-CF844026E571}"/>
+            </a:ext>
+          </a:extLst>
+        </p:cNvPr>
         <p:cNvGrpSpPr/>
         <p:nvPr/>
       </p:nvGrpSpPr>
@@ -3461,7 +3428,13 @@
       </p:grpSpPr>
       <p:sp>
         <p:nvSpPr>
-          <p:cNvPr id="3" name="Subtitle 2"/>
+          <p:cNvPr id="3" name="Subtitle 2">
+            <a:extLst>
+              <a:ext uri="{FF2B5EF4-FFF2-40B4-BE49-F238E27FC236}">
+                <a16:creationId xmlns:a16="http://schemas.microsoft.com/office/drawing/2014/main" id="{B8C82A0E-A30B-8C20-A29A-D86BCE912F43}"/>
+              </a:ext>
+            </a:extLst>
+          </p:cNvPr>
           <p:cNvSpPr>
             <a:spLocks noGrp="1"/>
           </p:cNvSpPr>
@@ -3471,7 +3444,7 @@
         </p:nvSpPr>
         <p:spPr>
           <a:xfrm>
-            <a:off x="203118" y="692696"/>
+            <a:off x="251520" y="692696"/>
             <a:ext cx="8640960" cy="6480720"/>
           </a:xfrm>
         </p:spPr>
@@ -3487,7 +3460,7 @@
                   <a:schemeClr val="bg1"/>
                 </a:solidFill>
               </a:rPr>
-              <a:t>Shout to the Lord</a:t>
+              <a:t>My comfort my shelter</a:t>
             </a:r>
           </a:p>
           <a:p>
@@ -3497,7 +3470,7 @@
                   <a:schemeClr val="bg1"/>
                 </a:solidFill>
               </a:rPr>
-              <a:t>All the earth let us sing</a:t>
+              <a:t>Tower of refuge and strength</a:t>
             </a:r>
           </a:p>
           <a:p>
@@ -3507,7 +3480,7 @@
                   <a:schemeClr val="bg1"/>
                 </a:solidFill>
               </a:rPr>
-              <a:t>Power and majesty</a:t>
+              <a:t>Let every breath all that I am</a:t>
             </a:r>
           </a:p>
           <a:p>
@@ -3517,44 +3490,20 @@
                   <a:schemeClr val="bg1"/>
                 </a:solidFill>
               </a:rPr>
-              <a:t>Praise to the King</a:t>
-            </a:r>
-          </a:p>
-          <a:p>
-            <a:r>
-              <a:rPr lang="en-GB" sz="3600" dirty="0">
-                <a:solidFill>
-                  <a:schemeClr val="bg1"/>
-                </a:solidFill>
-              </a:rPr>
-              <a:t>Mountains bow down</a:t>
-            </a:r>
-          </a:p>
-          <a:p>
-            <a:r>
-              <a:rPr lang="en-GB" sz="3600" dirty="0">
-                <a:solidFill>
-                  <a:schemeClr val="bg1"/>
-                </a:solidFill>
-              </a:rPr>
-              <a:t>And the seas will roar</a:t>
-            </a:r>
-          </a:p>
-          <a:p>
-            <a:r>
-              <a:rPr lang="en-GB" sz="3600" dirty="0">
-                <a:solidFill>
-                  <a:schemeClr val="bg1"/>
-                </a:solidFill>
-              </a:rPr>
-              <a:t>At the sound of Your name</a:t>
-            </a:r>
-          </a:p>
-        </p:txBody>
-      </p:sp>
-      <p:sp>
-        <p:nvSpPr>
-          <p:cNvPr id="4" name="TextBox 3"/>
+              <a:t>Never cease to worship You</a:t>
+            </a:r>
+          </a:p>
+        </p:txBody>
+      </p:sp>
+      <p:sp>
+        <p:nvSpPr>
+          <p:cNvPr id="4" name="TextBox 3">
+            <a:extLst>
+              <a:ext uri="{FF2B5EF4-FFF2-40B4-BE49-F238E27FC236}">
+                <a16:creationId xmlns:a16="http://schemas.microsoft.com/office/drawing/2014/main" id="{EEFCF216-3E71-422D-17B7-7948FE610FA9}"/>
+              </a:ext>
+            </a:extLst>
+          </p:cNvPr>
           <p:cNvSpPr txBox="1"/>
           <p:nvPr/>
         </p:nvSpPr>
@@ -3580,7 +3529,7 @@
                   <a:schemeClr val="bg1"/>
                 </a:solidFill>
               </a:rPr>
-              <a:t>2/3</a:t>
+              <a:t>2/4</a:t>
             </a:r>
           </a:p>
         </p:txBody>
@@ -3588,7 +3537,7 @@
     </p:spTree>
     <p:extLst>
       <p:ext uri="{BB962C8B-B14F-4D97-AF65-F5344CB8AC3E}">
-        <p14:creationId xmlns:p14="http://schemas.microsoft.com/office/powerpoint/2010/main" val="3970559637"/>
+        <p14:creationId xmlns:p14="http://schemas.microsoft.com/office/powerpoint/2010/main" val="2929817658"/>
       </p:ext>
     </p:extLst>
   </p:cSld>
@@ -3627,7 +3576,7 @@
         </p:nvSpPr>
         <p:spPr>
           <a:xfrm>
-            <a:off x="203118" y="764704"/>
+            <a:off x="203118" y="692696"/>
             <a:ext cx="8640960" cy="6480720"/>
           </a:xfrm>
         </p:spPr>
@@ -3643,7 +3592,7 @@
                   <a:schemeClr val="bg1"/>
                 </a:solidFill>
               </a:rPr>
-              <a:t>I sing for joy</a:t>
+              <a:t>Shout to the Lord</a:t>
             </a:r>
           </a:p>
           <a:p>
@@ -3653,7 +3602,7 @@
                   <a:schemeClr val="bg1"/>
                 </a:solidFill>
               </a:rPr>
-              <a:t>At the work of Your hands</a:t>
+              <a:t>All the earth let us sing</a:t>
             </a:r>
           </a:p>
           <a:p>
@@ -3663,7 +3612,7 @@
                   <a:schemeClr val="bg1"/>
                 </a:solidFill>
               </a:rPr>
-              <a:t>Forever I'll love You</a:t>
+              <a:t>Power and majesty</a:t>
             </a:r>
           </a:p>
           <a:p>
@@ -3673,7 +3622,7 @@
                   <a:schemeClr val="bg1"/>
                 </a:solidFill>
               </a:rPr>
-              <a:t>Forever I'll stand</a:t>
+              <a:t>Praise to the King</a:t>
             </a:r>
           </a:p>
           <a:p>
@@ -3683,7 +3632,7 @@
                   <a:schemeClr val="bg1"/>
                 </a:solidFill>
               </a:rPr>
-              <a:t>Nothing compares to the promise</a:t>
+              <a:t>Mountains bow down</a:t>
             </a:r>
           </a:p>
           <a:p>
@@ -3693,7 +3642,17 @@
                   <a:schemeClr val="bg1"/>
                 </a:solidFill>
               </a:rPr>
-              <a:t>I have in You</a:t>
+              <a:t>And the seas will roar</a:t>
+            </a:r>
+          </a:p>
+          <a:p>
+            <a:r>
+              <a:rPr lang="en-GB" sz="3600" dirty="0">
+                <a:solidFill>
+                  <a:schemeClr val="bg1"/>
+                </a:solidFill>
+              </a:rPr>
+              <a:t>At the sound of Your name</a:t>
             </a:r>
           </a:p>
         </p:txBody>
@@ -3726,7 +3685,153 @@
                   <a:schemeClr val="bg1"/>
                 </a:solidFill>
               </a:rPr>
-              <a:t>3/3</a:t>
+              <a:t>3/4</a:t>
+            </a:r>
+          </a:p>
+        </p:txBody>
+      </p:sp>
+    </p:spTree>
+    <p:extLst>
+      <p:ext uri="{BB962C8B-B14F-4D97-AF65-F5344CB8AC3E}">
+        <p14:creationId xmlns:p14="http://schemas.microsoft.com/office/powerpoint/2010/main" val="3970559637"/>
+      </p:ext>
+    </p:extLst>
+  </p:cSld>
+  <p:clrMapOvr>
+    <a:masterClrMapping/>
+  </p:clrMapOvr>
+</p:sld>
+</file>
+
+<file path=ppt/slides/slide5.xml><?xml version="1.0" encoding="utf-8"?>
+<p:sld xmlns:a="http://schemas.openxmlformats.org/drawingml/2006/main" xmlns:r="http://schemas.openxmlformats.org/officeDocument/2006/relationships" xmlns:p="http://schemas.openxmlformats.org/presentationml/2006/main">
+  <p:cSld>
+    <p:spTree>
+      <p:nvGrpSpPr>
+        <p:cNvPr id="1" name=""/>
+        <p:cNvGrpSpPr/>
+        <p:nvPr/>
+      </p:nvGrpSpPr>
+      <p:grpSpPr>
+        <a:xfrm>
+          <a:off x="0" y="0"/>
+          <a:ext cx="0" cy="0"/>
+          <a:chOff x="0" y="0"/>
+          <a:chExt cx="0" cy="0"/>
+        </a:xfrm>
+      </p:grpSpPr>
+      <p:sp>
+        <p:nvSpPr>
+          <p:cNvPr id="3" name="Subtitle 2"/>
+          <p:cNvSpPr>
+            <a:spLocks noGrp="1"/>
+          </p:cNvSpPr>
+          <p:nvPr>
+            <p:ph type="subTitle" idx="1"/>
+          </p:nvPr>
+        </p:nvSpPr>
+        <p:spPr>
+          <a:xfrm>
+            <a:off x="203118" y="764704"/>
+            <a:ext cx="8640960" cy="6480720"/>
+          </a:xfrm>
+        </p:spPr>
+        <p:txBody>
+          <a:bodyPr>
+            <a:noAutofit/>
+          </a:bodyPr>
+          <a:lstStyle/>
+          <a:p>
+            <a:r>
+              <a:rPr lang="en-GB" sz="3600" dirty="0">
+                <a:solidFill>
+                  <a:schemeClr val="bg1"/>
+                </a:solidFill>
+              </a:rPr>
+              <a:t>I sing for joy</a:t>
+            </a:r>
+          </a:p>
+          <a:p>
+            <a:r>
+              <a:rPr lang="en-GB" sz="3600" dirty="0">
+                <a:solidFill>
+                  <a:schemeClr val="bg1"/>
+                </a:solidFill>
+              </a:rPr>
+              <a:t>At the work of Your hands</a:t>
+            </a:r>
+          </a:p>
+          <a:p>
+            <a:r>
+              <a:rPr lang="en-GB" sz="3600" dirty="0">
+                <a:solidFill>
+                  <a:schemeClr val="bg1"/>
+                </a:solidFill>
+              </a:rPr>
+              <a:t>Forever I'll love You</a:t>
+            </a:r>
+          </a:p>
+          <a:p>
+            <a:r>
+              <a:rPr lang="en-GB" sz="3600" dirty="0">
+                <a:solidFill>
+                  <a:schemeClr val="bg1"/>
+                </a:solidFill>
+              </a:rPr>
+              <a:t>Forever I'll stand</a:t>
+            </a:r>
+          </a:p>
+          <a:p>
+            <a:r>
+              <a:rPr lang="en-GB" sz="3600" dirty="0">
+                <a:solidFill>
+                  <a:schemeClr val="bg1"/>
+                </a:solidFill>
+              </a:rPr>
+              <a:t>Nothing compares to the promise</a:t>
+            </a:r>
+          </a:p>
+          <a:p>
+            <a:r>
+              <a:rPr lang="en-GB" sz="3600" dirty="0">
+                <a:solidFill>
+                  <a:schemeClr val="bg1"/>
+                </a:solidFill>
+              </a:rPr>
+              <a:t>I have in You</a:t>
+            </a:r>
+          </a:p>
+        </p:txBody>
+      </p:sp>
+      <p:sp>
+        <p:nvSpPr>
+          <p:cNvPr id="4" name="TextBox 3"/>
+          <p:cNvSpPr txBox="1"/>
+          <p:nvPr/>
+        </p:nvSpPr>
+        <p:spPr>
+          <a:xfrm>
+            <a:off x="8529729" y="0"/>
+            <a:ext cx="628698" cy="461665"/>
+          </a:xfrm>
+          <a:prstGeom prst="rect">
+            <a:avLst/>
+          </a:prstGeom>
+          <a:noFill/>
+        </p:spPr>
+        <p:txBody>
+          <a:bodyPr wrap="none" rtlCol="0">
+            <a:spAutoFit/>
+          </a:bodyPr>
+          <a:lstStyle/>
+          <a:p>
+            <a:r>
+              <a:rPr lang="en-GB" sz="2400" b="1" dirty="0">
+                <a:solidFill>
+                  <a:schemeClr val="bg1"/>
+                </a:solidFill>
+              </a:rPr>
+              <a:t>4/4</a:t>
             </a:r>
           </a:p>
         </p:txBody>
